--- a/presentacion/Presentacion_PM_Ciberpoder_v6.pptx
+++ b/presentacion/Presentacion_PM_Ciberpoder_v6.pptx
@@ -1135,7 +1135,7 @@
           <a:lstStyle/>
           <a:p>
             <a:r>
-              <a:t>Saludo y presentación. Artículo dirigido a la Revista Científica General José María Córdova. La fórmula que ven abajo es el resultado central: la formulación clásica ampliada con tres variables estructurales y normalizada.</a:t>
+              <a:t>Saludo y presentación del trabajo de investigación. La fórmula que ven abajo es el resultado central: la formulación clásica ampliada con tres variables estructurales y normalizada.</a:t>
             </a:r>
           </a:p>
         </p:txBody>
@@ -2936,7 +2936,7 @@
                 <a:ea typeface="Calibri" pitchFamily="34" charset="-122"/>
                 <a:cs typeface="Calibri" pitchFamily="34" charset="-120"/>
               </a:rPr>
-              <a:t>ARTÍCULO CIENTÍFICO  ·  REVISTA CIENTÍFICA GENERAL JOSÉ MARÍA CÓRDOVA</a:t>
+              <a:t>INVESTIGACIÓN EN PODER MARÍTIMO  ·  CIBERDEFENSA  ·  ESTUDIOS ESTRATÉGICOS</a:t>
             </a:r>
             <a:endParaRPr lang="en-US" sz="1250" dirty="0"/>
           </a:p>
